--- a/assets/pptx/catalog-441.pptx
+++ b/assets/pptx/catalog-441.pptx
@@ -3246,7 +3246,7 @@
                 <a:ea typeface="Ebrima"/>
                 <a:cs typeface="Ebrima"/>
               </a:rPr>
-              <a:t>ቀሪ (Track 7)</a:t>
+              <a:t>ቀሪ Track 7</a:t>
             </a:r>
           </a:p>
         </p:txBody>
@@ -3349,7 +3349,7 @@
                 <a:ea typeface="Ebrima"/>
                 <a:cs typeface="Ebrima"/>
               </a:rPr>
-              <a:t>አንተ አይደለህም ወይ (4x)</a:t>
+              <a:t>አንተ አይደለህም ወይ 4x</a:t>
             </a:r>
           </a:p>
         </p:txBody>
@@ -3560,7 +3560,7 @@
                 <a:ea typeface="Ebrima"/>
                 <a:cs typeface="Ebrima"/>
               </a:rPr>
-              <a:t>እጠብቅሀለሁ ቀንና ቀንና ማታ (2x)</a:t>
+              <a:t>እጠብቅሀለሁ ቀንና ቀንና ማታ 2x</a:t>
             </a:r>
           </a:p>
           <a:p>
@@ -3946,7 +3946,7 @@
                 <a:ea typeface="Ebrima"/>
                 <a:cs typeface="Ebrima"/>
               </a:rPr>
-              <a:t>አትኩረው ያዩሀል ደግመህ እስከምትመጣ (2x)</a:t>
+              <a:t>አትኩረው ያዩሀል ደግመህ እስከምትመጣ 2x</a:t>
             </a:r>
           </a:p>
         </p:txBody>
@@ -4157,7 +4157,7 @@
                 <a:ea typeface="Ebrima"/>
                 <a:cs typeface="Ebrima"/>
               </a:rPr>
-              <a:t>እጠብቅሀለሁ ቀንና ቀንና ማታ (2x)</a:t>
+              <a:t>እጠብቅሀለሁ ቀንና ቀንና ማታ 2x</a:t>
             </a:r>
           </a:p>
           <a:p>
